--- a/statistics_04_logistic_regression.pptx
+++ b/statistics_04_logistic_regression.pptx
@@ -13368,7 +13368,7 @@
           <a:p>
             <a:r>
               <a:rPr lang="en-US" dirty="0"/>
-              <a:t>Coefficients "beta" are fitted using gradient descent.</a:t>
+              <a:t>The "beta" coefficients are fitted using gradient descent.</a:t>
             </a:r>
           </a:p>
           <a:p>
@@ -18253,7 +18253,7 @@
           <a:p>
             <a:r>
               <a:rPr lang="en-US" dirty="0"/>
-              <a:t>Fitting means - find the vector of parameters </a:t>
+              <a:t>Fitting meaning: find the vector of parameters </a:t>
             </a:r>
             <a:r>
               <a:rPr lang="el-GR" b="1" dirty="0">
@@ -18761,7 +18761,7 @@
           <a:p>
             <a:r>
               <a:rPr lang="en-US" dirty="0"/>
-              <a:t>covariance matrix is given by the </a:t>
+              <a:t>The covariance matrix is given by the </a:t>
             </a:r>
             <a:r>
               <a:rPr lang="en-US" b="1" dirty="0">
